--- a/catalog/editorial/templates/ed_cards_rows_2.pptx
+++ b/catalog/editorial/templates/ed_cards_rows_2.pptx
@@ -3577,7 +3577,7 @@
           <a:noFill/>
         </p:spPr>
         <p:txBody>
-          <a:bodyPr wrap="square" lIns="18288" rIns="18288" tIns="13716" bIns="13716">
+          <a:bodyPr wrap="square" anchor="t" lIns="18288" rIns="18288" tIns="13716" bIns="13716">
             <a:noAutofit/>
           </a:bodyPr>
           <a:lstStyle/>
@@ -3632,7 +3632,7 @@
           <a:noFill/>
         </p:spPr>
         <p:txBody>
-          <a:bodyPr wrap="square" lIns="18288" rIns="18288" tIns="13716" bIns="13716">
+          <a:bodyPr wrap="square" anchor="t" lIns="18288" rIns="18288" tIns="13716" bIns="13716">
             <a:noAutofit/>
           </a:bodyPr>
           <a:lstStyle/>
@@ -3687,7 +3687,7 @@
           <a:noFill/>
         </p:spPr>
         <p:txBody>
-          <a:bodyPr wrap="square" lIns="18288" rIns="18288" tIns="13716" bIns="13716">
+          <a:bodyPr wrap="square" anchor="t" lIns="18288" rIns="18288" tIns="13716" bIns="13716">
             <a:noAutofit/>
           </a:bodyPr>
           <a:lstStyle/>
@@ -3786,7 +3786,7 @@
           <a:noFill/>
         </p:spPr>
         <p:txBody>
-          <a:bodyPr wrap="square" lIns="18288" rIns="18288" tIns="13716" bIns="13716">
+          <a:bodyPr wrap="square" anchor="t" lIns="18288" rIns="18288" tIns="13716" bIns="13716">
             <a:noAutofit/>
           </a:bodyPr>
           <a:lstStyle/>
@@ -3841,7 +3841,7 @@
           <a:noFill/>
         </p:spPr>
         <p:txBody>
-          <a:bodyPr wrap="square" lIns="18288" rIns="18288" tIns="13716" bIns="13716">
+          <a:bodyPr wrap="square" anchor="t" lIns="18288" rIns="18288" tIns="13716" bIns="13716">
             <a:noAutofit/>
           </a:bodyPr>
           <a:lstStyle/>
@@ -3931,8 +3931,8 @@
         </p:nvSpPr>
         <p:spPr>
           <a:xfrm>
-            <a:off x="685800" y="2130552"/>
-            <a:ext cx="2834640" cy="685800"/>
+            <a:off x="685800" y="2139696"/>
+            <a:ext cx="2834640" cy="1901952"/>
           </a:xfrm>
           <a:prstGeom prst="rect">
             <a:avLst/>
@@ -3940,7 +3940,7 @@
           <a:noFill/>
         </p:spPr>
         <p:txBody>
-          <a:bodyPr wrap="square" lIns="18288" rIns="18288" tIns="13716" bIns="13716">
+          <a:bodyPr wrap="square" anchor="ctr" lIns="18288" rIns="18288" tIns="13716" bIns="13716">
             <a:noAutofit/>
           </a:bodyPr>
           <a:lstStyle/>
@@ -3995,7 +3995,7 @@
           <a:noFill/>
         </p:spPr>
         <p:txBody>
-          <a:bodyPr wrap="square" lIns="18288" rIns="18288" tIns="13716" bIns="13716">
+          <a:bodyPr wrap="square" anchor="t" lIns="18288" rIns="18288" tIns="13716" bIns="13716">
             <a:noAutofit/>
           </a:bodyPr>
           <a:lstStyle/>
@@ -4050,7 +4050,7 @@
           <a:noFill/>
         </p:spPr>
         <p:txBody>
-          <a:bodyPr wrap="square" lIns="18288" rIns="18288" tIns="13716" bIns="13716">
+          <a:bodyPr wrap="square" anchor="t" lIns="18288" rIns="18288" tIns="13716" bIns="13716">
             <a:noAutofit/>
           </a:bodyPr>
           <a:lstStyle/>
@@ -4140,8 +4140,8 @@
         </p:nvSpPr>
         <p:spPr>
           <a:xfrm>
-            <a:off x="685800" y="4087368"/>
-            <a:ext cx="2834640" cy="685800"/>
+            <a:off x="685800" y="4096512"/>
+            <a:ext cx="2834640" cy="1901952"/>
           </a:xfrm>
           <a:prstGeom prst="rect">
             <a:avLst/>
@@ -4149,7 +4149,7 @@
           <a:noFill/>
         </p:spPr>
         <p:txBody>
-          <a:bodyPr wrap="square" lIns="18288" rIns="18288" tIns="13716" bIns="13716">
+          <a:bodyPr wrap="square" anchor="ctr" lIns="18288" rIns="18288" tIns="13716" bIns="13716">
             <a:noAutofit/>
           </a:bodyPr>
           <a:lstStyle/>
@@ -4204,7 +4204,7 @@
           <a:noFill/>
         </p:spPr>
         <p:txBody>
-          <a:bodyPr wrap="square" lIns="18288" rIns="18288" tIns="13716" bIns="13716">
+          <a:bodyPr wrap="square" anchor="t" lIns="18288" rIns="18288" tIns="13716" bIns="13716">
             <a:noAutofit/>
           </a:bodyPr>
           <a:lstStyle/>
@@ -4259,7 +4259,7 @@
           <a:noFill/>
         </p:spPr>
         <p:txBody>
-          <a:bodyPr wrap="square" lIns="18288" rIns="18288" tIns="13716" bIns="13716">
+          <a:bodyPr wrap="square" anchor="t" lIns="18288" rIns="18288" tIns="13716" bIns="13716">
             <a:noAutofit/>
           </a:bodyPr>
           <a:lstStyle/>
